--- a/public/videos/repositories/study-reminder-ai/study-reminder-ai-tech-preview.pptx
+++ b/public/videos/repositories/study-reminder-ai/study-reminder-ai-tech-preview.pptx
@@ -134,7 +134,7 @@
           <p:cNvPr id="2" name="タイトル 1">
             <a:extLst>
               <a:ext uri="{FF2B5EF4-FFF2-40B4-BE49-F238E27FC236}">
-                <a16:creationId xmlns:a16="http://schemas.microsoft.com/office/drawing/2014/main" id="{2888F16D-AFAA-4B8B-7C98-1793924D0678}"/>
+                <a16:creationId xmlns:a16="http://schemas.microsoft.com/office/drawing/2014/main" id="{5AD1BBF5-AF07-9EA8-D284-6139A2548D40}"/>
               </a:ext>
             </a:extLst>
           </p:cNvPr>
@@ -171,7 +171,7 @@
           <p:cNvPr id="3" name="字幕 2">
             <a:extLst>
               <a:ext uri="{FF2B5EF4-FFF2-40B4-BE49-F238E27FC236}">
-                <a16:creationId xmlns:a16="http://schemas.microsoft.com/office/drawing/2014/main" id="{D75BA7CD-463C-7B83-786B-C83F12DCAD27}"/>
+                <a16:creationId xmlns:a16="http://schemas.microsoft.com/office/drawing/2014/main" id="{443BA2FB-8E9C-F925-0558-29221223404F}"/>
               </a:ext>
             </a:extLst>
           </p:cNvPr>
@@ -241,7 +241,7 @@
           <p:cNvPr id="4" name="日付プレースホルダー 3">
             <a:extLst>
               <a:ext uri="{FF2B5EF4-FFF2-40B4-BE49-F238E27FC236}">
-                <a16:creationId xmlns:a16="http://schemas.microsoft.com/office/drawing/2014/main" id="{0CB30EFF-9831-ABC0-9CFE-1E1FE5CBD775}"/>
+                <a16:creationId xmlns:a16="http://schemas.microsoft.com/office/drawing/2014/main" id="{7183A618-3F23-56EA-0A3B-25F5ECDFC334}"/>
               </a:ext>
             </a:extLst>
           </p:cNvPr>
@@ -257,7 +257,7 @@
           <a:bodyPr/>
           <a:lstStyle/>
           <a:p>
-            <a:fld id="{AAF852AD-EAB3-48BD-B801-0CD2243833DC}" type="datetimeFigureOut">
+            <a:fld id="{9D13EAE5-BCC3-44E8-A4A9-507A19F88389}" type="datetimeFigureOut">
               <a:rPr kumimoji="1" lang="ja-JP" altLang="en-US" smtClean="0"/>
               <a:t>2026/7/30</a:t>
             </a:fld>
@@ -270,7 +270,7 @@
           <p:cNvPr id="5" name="フッター プレースホルダー 4">
             <a:extLst>
               <a:ext uri="{FF2B5EF4-FFF2-40B4-BE49-F238E27FC236}">
-                <a16:creationId xmlns:a16="http://schemas.microsoft.com/office/drawing/2014/main" id="{9A0694FD-7A4D-0FD9-6D48-E0E0C8266867}"/>
+                <a16:creationId xmlns:a16="http://schemas.microsoft.com/office/drawing/2014/main" id="{EF451EF9-70A2-3C30-5CB4-36FA06C8CF5A}"/>
               </a:ext>
             </a:extLst>
           </p:cNvPr>
@@ -295,7 +295,7 @@
           <p:cNvPr id="6" name="スライド番号プレースホルダー 5">
             <a:extLst>
               <a:ext uri="{FF2B5EF4-FFF2-40B4-BE49-F238E27FC236}">
-                <a16:creationId xmlns:a16="http://schemas.microsoft.com/office/drawing/2014/main" id="{293EC511-AF26-C789-E8A9-8C86B5412B98}"/>
+                <a16:creationId xmlns:a16="http://schemas.microsoft.com/office/drawing/2014/main" id="{2D519902-1342-3644-E92D-08D0BC710525}"/>
               </a:ext>
             </a:extLst>
           </p:cNvPr>
@@ -311,7 +311,7 @@
           <a:bodyPr/>
           <a:lstStyle/>
           <a:p>
-            <a:fld id="{CC5904EF-0B9A-4A20-BCD2-8B47E413D5A6}" type="slidenum">
+            <a:fld id="{078D5B9E-33E3-4401-B5F2-B5E32A6F968F}" type="slidenum">
               <a:rPr kumimoji="1" lang="ja-JP" altLang="en-US" smtClean="0"/>
               <a:t>‹#›</a:t>
             </a:fld>
@@ -322,7 +322,7 @@
     </p:spTree>
     <p:extLst>
       <p:ext uri="{BB962C8B-B14F-4D97-AF65-F5344CB8AC3E}">
-        <p14:creationId xmlns:p14="http://schemas.microsoft.com/office/powerpoint/2010/main" val="3805099944"/>
+        <p14:creationId xmlns:p14="http://schemas.microsoft.com/office/powerpoint/2010/main" val="2805805242"/>
       </p:ext>
     </p:extLst>
   </p:cSld>
@@ -354,7 +354,7 @@
           <p:cNvPr id="2" name="タイトル 1">
             <a:extLst>
               <a:ext uri="{FF2B5EF4-FFF2-40B4-BE49-F238E27FC236}">
-                <a16:creationId xmlns:a16="http://schemas.microsoft.com/office/drawing/2014/main" id="{9E12986D-53EB-FEA3-17C7-586E198E1870}"/>
+                <a16:creationId xmlns:a16="http://schemas.microsoft.com/office/drawing/2014/main" id="{C1742764-08D3-57AD-0B30-67115801EE35}"/>
               </a:ext>
             </a:extLst>
           </p:cNvPr>
@@ -382,7 +382,7 @@
           <p:cNvPr id="3" name="縦書きテキスト プレースホルダー 2">
             <a:extLst>
               <a:ext uri="{FF2B5EF4-FFF2-40B4-BE49-F238E27FC236}">
-                <a16:creationId xmlns:a16="http://schemas.microsoft.com/office/drawing/2014/main" id="{B9DE5336-060F-F3A0-4F6B-64968A367968}"/>
+                <a16:creationId xmlns:a16="http://schemas.microsoft.com/office/drawing/2014/main" id="{5D29AE7F-DA38-B164-861C-0151AA0F29EA}"/>
               </a:ext>
             </a:extLst>
           </p:cNvPr>
@@ -471,7 +471,7 @@
           <p:cNvPr id="4" name="日付プレースホルダー 3">
             <a:extLst>
               <a:ext uri="{FF2B5EF4-FFF2-40B4-BE49-F238E27FC236}">
-                <a16:creationId xmlns:a16="http://schemas.microsoft.com/office/drawing/2014/main" id="{691E201F-4457-7899-1CF9-2C1C86D4AD47}"/>
+                <a16:creationId xmlns:a16="http://schemas.microsoft.com/office/drawing/2014/main" id="{6FD3AA67-8613-3E49-B285-814255C69CA7}"/>
               </a:ext>
             </a:extLst>
           </p:cNvPr>
@@ -487,7 +487,7 @@
           <a:bodyPr/>
           <a:lstStyle/>
           <a:p>
-            <a:fld id="{AAF852AD-EAB3-48BD-B801-0CD2243833DC}" type="datetimeFigureOut">
+            <a:fld id="{9D13EAE5-BCC3-44E8-A4A9-507A19F88389}" type="datetimeFigureOut">
               <a:rPr kumimoji="1" lang="ja-JP" altLang="en-US" smtClean="0"/>
               <a:t>2026/7/30</a:t>
             </a:fld>
@@ -500,7 +500,7 @@
           <p:cNvPr id="5" name="フッター プレースホルダー 4">
             <a:extLst>
               <a:ext uri="{FF2B5EF4-FFF2-40B4-BE49-F238E27FC236}">
-                <a16:creationId xmlns:a16="http://schemas.microsoft.com/office/drawing/2014/main" id="{710E84B8-8CD3-D4E0-8E26-681077724348}"/>
+                <a16:creationId xmlns:a16="http://schemas.microsoft.com/office/drawing/2014/main" id="{C4612500-D220-9BEA-EEE1-731A1351C548}"/>
               </a:ext>
             </a:extLst>
           </p:cNvPr>
@@ -525,7 +525,7 @@
           <p:cNvPr id="6" name="スライド番号プレースホルダー 5">
             <a:extLst>
               <a:ext uri="{FF2B5EF4-FFF2-40B4-BE49-F238E27FC236}">
-                <a16:creationId xmlns:a16="http://schemas.microsoft.com/office/drawing/2014/main" id="{11061E92-815D-D968-0267-168A59F8EAF0}"/>
+                <a16:creationId xmlns:a16="http://schemas.microsoft.com/office/drawing/2014/main" id="{3FBF84EC-F213-410E-F238-11599173EB45}"/>
               </a:ext>
             </a:extLst>
           </p:cNvPr>
@@ -541,7 +541,7 @@
           <a:bodyPr/>
           <a:lstStyle/>
           <a:p>
-            <a:fld id="{CC5904EF-0B9A-4A20-BCD2-8B47E413D5A6}" type="slidenum">
+            <a:fld id="{078D5B9E-33E3-4401-B5F2-B5E32A6F968F}" type="slidenum">
               <a:rPr kumimoji="1" lang="ja-JP" altLang="en-US" smtClean="0"/>
               <a:t>‹#›</a:t>
             </a:fld>
@@ -552,7 +552,7 @@
     </p:spTree>
     <p:extLst>
       <p:ext uri="{BB962C8B-B14F-4D97-AF65-F5344CB8AC3E}">
-        <p14:creationId xmlns:p14="http://schemas.microsoft.com/office/powerpoint/2010/main" val="864436004"/>
+        <p14:creationId xmlns:p14="http://schemas.microsoft.com/office/powerpoint/2010/main" val="1266438039"/>
       </p:ext>
     </p:extLst>
   </p:cSld>
@@ -584,7 +584,7 @@
           <p:cNvPr id="2" name="縦書きタイトル 1">
             <a:extLst>
               <a:ext uri="{FF2B5EF4-FFF2-40B4-BE49-F238E27FC236}">
-                <a16:creationId xmlns:a16="http://schemas.microsoft.com/office/drawing/2014/main" id="{662D1EFF-83F0-8D30-C445-E648430DB86F}"/>
+                <a16:creationId xmlns:a16="http://schemas.microsoft.com/office/drawing/2014/main" id="{B84B6347-8CE9-D942-D4F6-02105B3C6AC2}"/>
               </a:ext>
             </a:extLst>
           </p:cNvPr>
@@ -617,7 +617,7 @@
           <p:cNvPr id="3" name="縦書きテキスト プレースホルダー 2">
             <a:extLst>
               <a:ext uri="{FF2B5EF4-FFF2-40B4-BE49-F238E27FC236}">
-                <a16:creationId xmlns:a16="http://schemas.microsoft.com/office/drawing/2014/main" id="{2D2433B0-5CC4-F533-356B-927C0FE691B0}"/>
+                <a16:creationId xmlns:a16="http://schemas.microsoft.com/office/drawing/2014/main" id="{8989FD8C-A054-E283-9C10-1895AA0F5F16}"/>
               </a:ext>
             </a:extLst>
           </p:cNvPr>
@@ -711,7 +711,7 @@
           <p:cNvPr id="4" name="日付プレースホルダー 3">
             <a:extLst>
               <a:ext uri="{FF2B5EF4-FFF2-40B4-BE49-F238E27FC236}">
-                <a16:creationId xmlns:a16="http://schemas.microsoft.com/office/drawing/2014/main" id="{F718C54A-F75A-B0D2-6610-58F32537FAE7}"/>
+                <a16:creationId xmlns:a16="http://schemas.microsoft.com/office/drawing/2014/main" id="{57A1CF08-9B0A-34E6-FA35-50C37E07ACA3}"/>
               </a:ext>
             </a:extLst>
           </p:cNvPr>
@@ -727,7 +727,7 @@
           <a:bodyPr/>
           <a:lstStyle/>
           <a:p>
-            <a:fld id="{AAF852AD-EAB3-48BD-B801-0CD2243833DC}" type="datetimeFigureOut">
+            <a:fld id="{9D13EAE5-BCC3-44E8-A4A9-507A19F88389}" type="datetimeFigureOut">
               <a:rPr kumimoji="1" lang="ja-JP" altLang="en-US" smtClean="0"/>
               <a:t>2026/7/30</a:t>
             </a:fld>
@@ -740,7 +740,7 @@
           <p:cNvPr id="5" name="フッター プレースホルダー 4">
             <a:extLst>
               <a:ext uri="{FF2B5EF4-FFF2-40B4-BE49-F238E27FC236}">
-                <a16:creationId xmlns:a16="http://schemas.microsoft.com/office/drawing/2014/main" id="{01850932-6C99-2612-4AE8-9AC9030B3421}"/>
+                <a16:creationId xmlns:a16="http://schemas.microsoft.com/office/drawing/2014/main" id="{59559448-0B8F-D149-351B-32D86589797E}"/>
               </a:ext>
             </a:extLst>
           </p:cNvPr>
@@ -765,7 +765,7 @@
           <p:cNvPr id="6" name="スライド番号プレースホルダー 5">
             <a:extLst>
               <a:ext uri="{FF2B5EF4-FFF2-40B4-BE49-F238E27FC236}">
-                <a16:creationId xmlns:a16="http://schemas.microsoft.com/office/drawing/2014/main" id="{18A3F5DC-FA1C-C8A5-9979-FD74EDC3A1CB}"/>
+                <a16:creationId xmlns:a16="http://schemas.microsoft.com/office/drawing/2014/main" id="{D956D5D5-D875-EAD4-2729-65BE5907699B}"/>
               </a:ext>
             </a:extLst>
           </p:cNvPr>
@@ -781,7 +781,7 @@
           <a:bodyPr/>
           <a:lstStyle/>
           <a:p>
-            <a:fld id="{CC5904EF-0B9A-4A20-BCD2-8B47E413D5A6}" type="slidenum">
+            <a:fld id="{078D5B9E-33E3-4401-B5F2-B5E32A6F968F}" type="slidenum">
               <a:rPr kumimoji="1" lang="ja-JP" altLang="en-US" smtClean="0"/>
               <a:t>‹#›</a:t>
             </a:fld>
@@ -792,7 +792,7 @@
     </p:spTree>
     <p:extLst>
       <p:ext uri="{BB962C8B-B14F-4D97-AF65-F5344CB8AC3E}">
-        <p14:creationId xmlns:p14="http://schemas.microsoft.com/office/powerpoint/2010/main" val="4009294180"/>
+        <p14:creationId xmlns:p14="http://schemas.microsoft.com/office/powerpoint/2010/main" val="3616710047"/>
       </p:ext>
     </p:extLst>
   </p:cSld>
@@ -824,7 +824,7 @@
           <p:cNvPr id="2" name="タイトル 1">
             <a:extLst>
               <a:ext uri="{FF2B5EF4-FFF2-40B4-BE49-F238E27FC236}">
-                <a16:creationId xmlns:a16="http://schemas.microsoft.com/office/drawing/2014/main" id="{7C921F62-725C-4E95-DE7B-FCE3B8C152B6}"/>
+                <a16:creationId xmlns:a16="http://schemas.microsoft.com/office/drawing/2014/main" id="{17143EC1-6623-8800-F98E-DE7D2FC959A4}"/>
               </a:ext>
             </a:extLst>
           </p:cNvPr>
@@ -852,7 +852,7 @@
           <p:cNvPr id="3" name="コンテンツ プレースホルダー 2">
             <a:extLst>
               <a:ext uri="{FF2B5EF4-FFF2-40B4-BE49-F238E27FC236}">
-                <a16:creationId xmlns:a16="http://schemas.microsoft.com/office/drawing/2014/main" id="{DF04772B-CCEF-4717-323A-1DD5D03FCA20}"/>
+                <a16:creationId xmlns:a16="http://schemas.microsoft.com/office/drawing/2014/main" id="{06063019-C7CC-CCB6-446F-95BCEEC4B2F9}"/>
               </a:ext>
             </a:extLst>
           </p:cNvPr>
@@ -941,7 +941,7 @@
           <p:cNvPr id="4" name="日付プレースホルダー 3">
             <a:extLst>
               <a:ext uri="{FF2B5EF4-FFF2-40B4-BE49-F238E27FC236}">
-                <a16:creationId xmlns:a16="http://schemas.microsoft.com/office/drawing/2014/main" id="{BE4127CE-3775-1A68-CF67-33A59A7D657A}"/>
+                <a16:creationId xmlns:a16="http://schemas.microsoft.com/office/drawing/2014/main" id="{9CE0BCEB-B583-E51D-E7F9-2B155718B2FF}"/>
               </a:ext>
             </a:extLst>
           </p:cNvPr>
@@ -957,7 +957,7 @@
           <a:bodyPr/>
           <a:lstStyle/>
           <a:p>
-            <a:fld id="{AAF852AD-EAB3-48BD-B801-0CD2243833DC}" type="datetimeFigureOut">
+            <a:fld id="{9D13EAE5-BCC3-44E8-A4A9-507A19F88389}" type="datetimeFigureOut">
               <a:rPr kumimoji="1" lang="ja-JP" altLang="en-US" smtClean="0"/>
               <a:t>2026/7/30</a:t>
             </a:fld>
@@ -970,7 +970,7 @@
           <p:cNvPr id="5" name="フッター プレースホルダー 4">
             <a:extLst>
               <a:ext uri="{FF2B5EF4-FFF2-40B4-BE49-F238E27FC236}">
-                <a16:creationId xmlns:a16="http://schemas.microsoft.com/office/drawing/2014/main" id="{370B86D0-08D6-0F7B-C2A6-6DEE717470FB}"/>
+                <a16:creationId xmlns:a16="http://schemas.microsoft.com/office/drawing/2014/main" id="{BAEEB27B-C709-1B3D-B499-51BB42C306C4}"/>
               </a:ext>
             </a:extLst>
           </p:cNvPr>
@@ -995,7 +995,7 @@
           <p:cNvPr id="6" name="スライド番号プレースホルダー 5">
             <a:extLst>
               <a:ext uri="{FF2B5EF4-FFF2-40B4-BE49-F238E27FC236}">
-                <a16:creationId xmlns:a16="http://schemas.microsoft.com/office/drawing/2014/main" id="{ECBB153F-532F-685F-F9EF-7B9A3F7AFDAC}"/>
+                <a16:creationId xmlns:a16="http://schemas.microsoft.com/office/drawing/2014/main" id="{99F5AF6A-C1C8-169E-573D-51BCA990F4B0}"/>
               </a:ext>
             </a:extLst>
           </p:cNvPr>
@@ -1011,7 +1011,7 @@
           <a:bodyPr/>
           <a:lstStyle/>
           <a:p>
-            <a:fld id="{CC5904EF-0B9A-4A20-BCD2-8B47E413D5A6}" type="slidenum">
+            <a:fld id="{078D5B9E-33E3-4401-B5F2-B5E32A6F968F}" type="slidenum">
               <a:rPr kumimoji="1" lang="ja-JP" altLang="en-US" smtClean="0"/>
               <a:t>‹#›</a:t>
             </a:fld>
@@ -1022,7 +1022,7 @@
     </p:spTree>
     <p:extLst>
       <p:ext uri="{BB962C8B-B14F-4D97-AF65-F5344CB8AC3E}">
-        <p14:creationId xmlns:p14="http://schemas.microsoft.com/office/powerpoint/2010/main" val="2114146353"/>
+        <p14:creationId xmlns:p14="http://schemas.microsoft.com/office/powerpoint/2010/main" val="1936615091"/>
       </p:ext>
     </p:extLst>
   </p:cSld>
@@ -1054,7 +1054,7 @@
           <p:cNvPr id="2" name="タイトル 1">
             <a:extLst>
               <a:ext uri="{FF2B5EF4-FFF2-40B4-BE49-F238E27FC236}">
-                <a16:creationId xmlns:a16="http://schemas.microsoft.com/office/drawing/2014/main" id="{18002C70-282C-0557-9678-3827D7F709C5}"/>
+                <a16:creationId xmlns:a16="http://schemas.microsoft.com/office/drawing/2014/main" id="{68F9825D-9882-C809-D4AC-F4AA1E5395DC}"/>
               </a:ext>
             </a:extLst>
           </p:cNvPr>
@@ -1091,7 +1091,7 @@
           <p:cNvPr id="3" name="テキスト プレースホルダー 2">
             <a:extLst>
               <a:ext uri="{FF2B5EF4-FFF2-40B4-BE49-F238E27FC236}">
-                <a16:creationId xmlns:a16="http://schemas.microsoft.com/office/drawing/2014/main" id="{68609117-A6C0-F775-5B1D-2755F7954A64}"/>
+                <a16:creationId xmlns:a16="http://schemas.microsoft.com/office/drawing/2014/main" id="{E39F7203-34A0-7B71-8E11-4C3F72C29ECD}"/>
               </a:ext>
             </a:extLst>
           </p:cNvPr>
@@ -1216,7 +1216,7 @@
           <p:cNvPr id="4" name="日付プレースホルダー 3">
             <a:extLst>
               <a:ext uri="{FF2B5EF4-FFF2-40B4-BE49-F238E27FC236}">
-                <a16:creationId xmlns:a16="http://schemas.microsoft.com/office/drawing/2014/main" id="{92365ECA-3E7C-D267-F818-1E176F067378}"/>
+                <a16:creationId xmlns:a16="http://schemas.microsoft.com/office/drawing/2014/main" id="{6AE1D4C6-4B71-B403-1A9F-65E184007018}"/>
               </a:ext>
             </a:extLst>
           </p:cNvPr>
@@ -1232,7 +1232,7 @@
           <a:bodyPr/>
           <a:lstStyle/>
           <a:p>
-            <a:fld id="{AAF852AD-EAB3-48BD-B801-0CD2243833DC}" type="datetimeFigureOut">
+            <a:fld id="{9D13EAE5-BCC3-44E8-A4A9-507A19F88389}" type="datetimeFigureOut">
               <a:rPr kumimoji="1" lang="ja-JP" altLang="en-US" smtClean="0"/>
               <a:t>2026/7/30</a:t>
             </a:fld>
@@ -1245,7 +1245,7 @@
           <p:cNvPr id="5" name="フッター プレースホルダー 4">
             <a:extLst>
               <a:ext uri="{FF2B5EF4-FFF2-40B4-BE49-F238E27FC236}">
-                <a16:creationId xmlns:a16="http://schemas.microsoft.com/office/drawing/2014/main" id="{F03B97FE-2CAD-1810-B834-02E98977F4E5}"/>
+                <a16:creationId xmlns:a16="http://schemas.microsoft.com/office/drawing/2014/main" id="{D29CBEE4-5430-B4C2-E98F-3CDA85C16549}"/>
               </a:ext>
             </a:extLst>
           </p:cNvPr>
@@ -1270,7 +1270,7 @@
           <p:cNvPr id="6" name="スライド番号プレースホルダー 5">
             <a:extLst>
               <a:ext uri="{FF2B5EF4-FFF2-40B4-BE49-F238E27FC236}">
-                <a16:creationId xmlns:a16="http://schemas.microsoft.com/office/drawing/2014/main" id="{33779053-94F4-C621-A7D0-BEABF9F3DFCE}"/>
+                <a16:creationId xmlns:a16="http://schemas.microsoft.com/office/drawing/2014/main" id="{F9578CA3-588E-F20B-F6CA-E1981BF6BE58}"/>
               </a:ext>
             </a:extLst>
           </p:cNvPr>
@@ -1286,7 +1286,7 @@
           <a:bodyPr/>
           <a:lstStyle/>
           <a:p>
-            <a:fld id="{CC5904EF-0B9A-4A20-BCD2-8B47E413D5A6}" type="slidenum">
+            <a:fld id="{078D5B9E-33E3-4401-B5F2-B5E32A6F968F}" type="slidenum">
               <a:rPr kumimoji="1" lang="ja-JP" altLang="en-US" smtClean="0"/>
               <a:t>‹#›</a:t>
             </a:fld>
@@ -1297,7 +1297,7 @@
     </p:spTree>
     <p:extLst>
       <p:ext uri="{BB962C8B-B14F-4D97-AF65-F5344CB8AC3E}">
-        <p14:creationId xmlns:p14="http://schemas.microsoft.com/office/powerpoint/2010/main" val="3094822697"/>
+        <p14:creationId xmlns:p14="http://schemas.microsoft.com/office/powerpoint/2010/main" val="3709621775"/>
       </p:ext>
     </p:extLst>
   </p:cSld>
@@ -1329,7 +1329,7 @@
           <p:cNvPr id="2" name="タイトル 1">
             <a:extLst>
               <a:ext uri="{FF2B5EF4-FFF2-40B4-BE49-F238E27FC236}">
-                <a16:creationId xmlns:a16="http://schemas.microsoft.com/office/drawing/2014/main" id="{DC9E8A2D-E97D-1810-4912-7A8E4BD7B653}"/>
+                <a16:creationId xmlns:a16="http://schemas.microsoft.com/office/drawing/2014/main" id="{2DDFABC0-2484-AD89-72B9-F62CCB6A18F2}"/>
               </a:ext>
             </a:extLst>
           </p:cNvPr>
@@ -1357,7 +1357,7 @@
           <p:cNvPr id="3" name="コンテンツ プレースホルダー 2">
             <a:extLst>
               <a:ext uri="{FF2B5EF4-FFF2-40B4-BE49-F238E27FC236}">
-                <a16:creationId xmlns:a16="http://schemas.microsoft.com/office/drawing/2014/main" id="{FCEC1CD4-C5ED-69FF-EC16-692F8ABB3039}"/>
+                <a16:creationId xmlns:a16="http://schemas.microsoft.com/office/drawing/2014/main" id="{A65F105B-037A-CB77-F961-C3DCC1D42E93}"/>
               </a:ext>
             </a:extLst>
           </p:cNvPr>
@@ -1451,7 +1451,7 @@
           <p:cNvPr id="4" name="コンテンツ プレースホルダー 3">
             <a:extLst>
               <a:ext uri="{FF2B5EF4-FFF2-40B4-BE49-F238E27FC236}">
-                <a16:creationId xmlns:a16="http://schemas.microsoft.com/office/drawing/2014/main" id="{1D75B5DE-7940-8597-81B6-75FFF0E8720D}"/>
+                <a16:creationId xmlns:a16="http://schemas.microsoft.com/office/drawing/2014/main" id="{D012EFCD-8FE5-5E92-D68B-D1DA24DEAF76}"/>
               </a:ext>
             </a:extLst>
           </p:cNvPr>
@@ -1545,7 +1545,7 @@
           <p:cNvPr id="5" name="日付プレースホルダー 4">
             <a:extLst>
               <a:ext uri="{FF2B5EF4-FFF2-40B4-BE49-F238E27FC236}">
-                <a16:creationId xmlns:a16="http://schemas.microsoft.com/office/drawing/2014/main" id="{D6524350-CF61-4400-B3E8-4E0CC6A82E58}"/>
+                <a16:creationId xmlns:a16="http://schemas.microsoft.com/office/drawing/2014/main" id="{5B2DF0A6-7465-E38B-0D4C-903FF191A4E2}"/>
               </a:ext>
             </a:extLst>
           </p:cNvPr>
@@ -1561,7 +1561,7 @@
           <a:bodyPr/>
           <a:lstStyle/>
           <a:p>
-            <a:fld id="{AAF852AD-EAB3-48BD-B801-0CD2243833DC}" type="datetimeFigureOut">
+            <a:fld id="{9D13EAE5-BCC3-44E8-A4A9-507A19F88389}" type="datetimeFigureOut">
               <a:rPr kumimoji="1" lang="ja-JP" altLang="en-US" smtClean="0"/>
               <a:t>2026/7/30</a:t>
             </a:fld>
@@ -1574,7 +1574,7 @@
           <p:cNvPr id="6" name="フッター プレースホルダー 5">
             <a:extLst>
               <a:ext uri="{FF2B5EF4-FFF2-40B4-BE49-F238E27FC236}">
-                <a16:creationId xmlns:a16="http://schemas.microsoft.com/office/drawing/2014/main" id="{8E3FA0D5-8FC3-8D1B-F0AA-55D656E639A8}"/>
+                <a16:creationId xmlns:a16="http://schemas.microsoft.com/office/drawing/2014/main" id="{DF4B79E4-FF29-F231-A753-D011C3F06DF8}"/>
               </a:ext>
             </a:extLst>
           </p:cNvPr>
@@ -1599,7 +1599,7 @@
           <p:cNvPr id="7" name="スライド番号プレースホルダー 6">
             <a:extLst>
               <a:ext uri="{FF2B5EF4-FFF2-40B4-BE49-F238E27FC236}">
-                <a16:creationId xmlns:a16="http://schemas.microsoft.com/office/drawing/2014/main" id="{C2573851-84FA-C461-3E86-562AFFCB234B}"/>
+                <a16:creationId xmlns:a16="http://schemas.microsoft.com/office/drawing/2014/main" id="{9C22A9CD-34E2-A454-63B1-2AB38D9817A7}"/>
               </a:ext>
             </a:extLst>
           </p:cNvPr>
@@ -1615,7 +1615,7 @@
           <a:bodyPr/>
           <a:lstStyle/>
           <a:p>
-            <a:fld id="{CC5904EF-0B9A-4A20-BCD2-8B47E413D5A6}" type="slidenum">
+            <a:fld id="{078D5B9E-33E3-4401-B5F2-B5E32A6F968F}" type="slidenum">
               <a:rPr kumimoji="1" lang="ja-JP" altLang="en-US" smtClean="0"/>
               <a:t>‹#›</a:t>
             </a:fld>
@@ -1626,7 +1626,7 @@
     </p:spTree>
     <p:extLst>
       <p:ext uri="{BB962C8B-B14F-4D97-AF65-F5344CB8AC3E}">
-        <p14:creationId xmlns:p14="http://schemas.microsoft.com/office/powerpoint/2010/main" val="2479447159"/>
+        <p14:creationId xmlns:p14="http://schemas.microsoft.com/office/powerpoint/2010/main" val="420510485"/>
       </p:ext>
     </p:extLst>
   </p:cSld>
@@ -1658,7 +1658,7 @@
           <p:cNvPr id="2" name="タイトル 1">
             <a:extLst>
               <a:ext uri="{FF2B5EF4-FFF2-40B4-BE49-F238E27FC236}">
-                <a16:creationId xmlns:a16="http://schemas.microsoft.com/office/drawing/2014/main" id="{5654B975-26EA-7D6A-4AC5-CE5B7B63C49D}"/>
+                <a16:creationId xmlns:a16="http://schemas.microsoft.com/office/drawing/2014/main" id="{096600F4-1EC8-C5FF-EB2E-95805D778B88}"/>
               </a:ext>
             </a:extLst>
           </p:cNvPr>
@@ -1691,7 +1691,7 @@
           <p:cNvPr id="3" name="テキスト プレースホルダー 2">
             <a:extLst>
               <a:ext uri="{FF2B5EF4-FFF2-40B4-BE49-F238E27FC236}">
-                <a16:creationId xmlns:a16="http://schemas.microsoft.com/office/drawing/2014/main" id="{B8A7D1DF-08FE-FBFB-6A0D-20DE26DB8EB3}"/>
+                <a16:creationId xmlns:a16="http://schemas.microsoft.com/office/drawing/2014/main" id="{CB61E36F-61D6-3B46-892B-A502CDDABAE0}"/>
               </a:ext>
             </a:extLst>
           </p:cNvPr>
@@ -1762,7 +1762,7 @@
           <p:cNvPr id="4" name="コンテンツ プレースホルダー 3">
             <a:extLst>
               <a:ext uri="{FF2B5EF4-FFF2-40B4-BE49-F238E27FC236}">
-                <a16:creationId xmlns:a16="http://schemas.microsoft.com/office/drawing/2014/main" id="{CC555580-EB60-965A-BE2D-7498F5D9F355}"/>
+                <a16:creationId xmlns:a16="http://schemas.microsoft.com/office/drawing/2014/main" id="{525B00F8-3547-3632-A089-7BFDE9EB6B01}"/>
               </a:ext>
             </a:extLst>
           </p:cNvPr>
@@ -1856,7 +1856,7 @@
           <p:cNvPr id="5" name="テキスト プレースホルダー 4">
             <a:extLst>
               <a:ext uri="{FF2B5EF4-FFF2-40B4-BE49-F238E27FC236}">
-                <a16:creationId xmlns:a16="http://schemas.microsoft.com/office/drawing/2014/main" id="{376777F6-0D09-E72C-E649-131A96635647}"/>
+                <a16:creationId xmlns:a16="http://schemas.microsoft.com/office/drawing/2014/main" id="{824FA199-E8A5-AEC8-B92C-4938C75955BC}"/>
               </a:ext>
             </a:extLst>
           </p:cNvPr>
@@ -1927,7 +1927,7 @@
           <p:cNvPr id="6" name="コンテンツ プレースホルダー 5">
             <a:extLst>
               <a:ext uri="{FF2B5EF4-FFF2-40B4-BE49-F238E27FC236}">
-                <a16:creationId xmlns:a16="http://schemas.microsoft.com/office/drawing/2014/main" id="{29B80CB9-3287-54B6-22CC-2C707BAB40E1}"/>
+                <a16:creationId xmlns:a16="http://schemas.microsoft.com/office/drawing/2014/main" id="{3DF7489B-F468-46F4-5D1C-59D80E836FE6}"/>
               </a:ext>
             </a:extLst>
           </p:cNvPr>
@@ -2021,7 +2021,7 @@
           <p:cNvPr id="7" name="日付プレースホルダー 6">
             <a:extLst>
               <a:ext uri="{FF2B5EF4-FFF2-40B4-BE49-F238E27FC236}">
-                <a16:creationId xmlns:a16="http://schemas.microsoft.com/office/drawing/2014/main" id="{1F4A3AAF-F56C-C3D3-088D-4EB629B558C0}"/>
+                <a16:creationId xmlns:a16="http://schemas.microsoft.com/office/drawing/2014/main" id="{BF8267B0-E698-623E-3D2D-FF6BEFB85E12}"/>
               </a:ext>
             </a:extLst>
           </p:cNvPr>
@@ -2037,7 +2037,7 @@
           <a:bodyPr/>
           <a:lstStyle/>
           <a:p>
-            <a:fld id="{AAF852AD-EAB3-48BD-B801-0CD2243833DC}" type="datetimeFigureOut">
+            <a:fld id="{9D13EAE5-BCC3-44E8-A4A9-507A19F88389}" type="datetimeFigureOut">
               <a:rPr kumimoji="1" lang="ja-JP" altLang="en-US" smtClean="0"/>
               <a:t>2026/7/30</a:t>
             </a:fld>
@@ -2050,7 +2050,7 @@
           <p:cNvPr id="8" name="フッター プレースホルダー 7">
             <a:extLst>
               <a:ext uri="{FF2B5EF4-FFF2-40B4-BE49-F238E27FC236}">
-                <a16:creationId xmlns:a16="http://schemas.microsoft.com/office/drawing/2014/main" id="{E8CDF0E6-6ACD-3A75-24CF-56CD04DE74E0}"/>
+                <a16:creationId xmlns:a16="http://schemas.microsoft.com/office/drawing/2014/main" id="{2C9E3681-1B99-3A14-F4AE-24D1ED3325C2}"/>
               </a:ext>
             </a:extLst>
           </p:cNvPr>
@@ -2075,7 +2075,7 @@
           <p:cNvPr id="9" name="スライド番号プレースホルダー 8">
             <a:extLst>
               <a:ext uri="{FF2B5EF4-FFF2-40B4-BE49-F238E27FC236}">
-                <a16:creationId xmlns:a16="http://schemas.microsoft.com/office/drawing/2014/main" id="{932B39BE-C702-BE11-4CB3-C64370B6B862}"/>
+                <a16:creationId xmlns:a16="http://schemas.microsoft.com/office/drawing/2014/main" id="{B27941A4-F244-A18A-6F98-37A4113CE129}"/>
               </a:ext>
             </a:extLst>
           </p:cNvPr>
@@ -2091,7 +2091,7 @@
           <a:bodyPr/>
           <a:lstStyle/>
           <a:p>
-            <a:fld id="{CC5904EF-0B9A-4A20-BCD2-8B47E413D5A6}" type="slidenum">
+            <a:fld id="{078D5B9E-33E3-4401-B5F2-B5E32A6F968F}" type="slidenum">
               <a:rPr kumimoji="1" lang="ja-JP" altLang="en-US" smtClean="0"/>
               <a:t>‹#›</a:t>
             </a:fld>
@@ -2102,7 +2102,7 @@
     </p:spTree>
     <p:extLst>
       <p:ext uri="{BB962C8B-B14F-4D97-AF65-F5344CB8AC3E}">
-        <p14:creationId xmlns:p14="http://schemas.microsoft.com/office/powerpoint/2010/main" val="1636434081"/>
+        <p14:creationId xmlns:p14="http://schemas.microsoft.com/office/powerpoint/2010/main" val="284077641"/>
       </p:ext>
     </p:extLst>
   </p:cSld>
@@ -2134,7 +2134,7 @@
           <p:cNvPr id="2" name="タイトル 1">
             <a:extLst>
               <a:ext uri="{FF2B5EF4-FFF2-40B4-BE49-F238E27FC236}">
-                <a16:creationId xmlns:a16="http://schemas.microsoft.com/office/drawing/2014/main" id="{353C3442-0BE9-E34B-19E9-687982222C10}"/>
+                <a16:creationId xmlns:a16="http://schemas.microsoft.com/office/drawing/2014/main" id="{4CDAF14D-44A7-1B00-16EC-9CE9A1EA4AFA}"/>
               </a:ext>
             </a:extLst>
           </p:cNvPr>
@@ -2162,7 +2162,7 @@
           <p:cNvPr id="3" name="日付プレースホルダー 2">
             <a:extLst>
               <a:ext uri="{FF2B5EF4-FFF2-40B4-BE49-F238E27FC236}">
-                <a16:creationId xmlns:a16="http://schemas.microsoft.com/office/drawing/2014/main" id="{FFF78A85-4044-5D80-AB4B-F7C6A06537B5}"/>
+                <a16:creationId xmlns:a16="http://schemas.microsoft.com/office/drawing/2014/main" id="{8E1CD8CF-153A-F4CF-FA46-98480DAFA2B3}"/>
               </a:ext>
             </a:extLst>
           </p:cNvPr>
@@ -2178,7 +2178,7 @@
           <a:bodyPr/>
           <a:lstStyle/>
           <a:p>
-            <a:fld id="{AAF852AD-EAB3-48BD-B801-0CD2243833DC}" type="datetimeFigureOut">
+            <a:fld id="{9D13EAE5-BCC3-44E8-A4A9-507A19F88389}" type="datetimeFigureOut">
               <a:rPr kumimoji="1" lang="ja-JP" altLang="en-US" smtClean="0"/>
               <a:t>2026/7/30</a:t>
             </a:fld>
@@ -2191,7 +2191,7 @@
           <p:cNvPr id="4" name="フッター プレースホルダー 3">
             <a:extLst>
               <a:ext uri="{FF2B5EF4-FFF2-40B4-BE49-F238E27FC236}">
-                <a16:creationId xmlns:a16="http://schemas.microsoft.com/office/drawing/2014/main" id="{113A6511-465B-A650-68CB-E83C8D2CDCE5}"/>
+                <a16:creationId xmlns:a16="http://schemas.microsoft.com/office/drawing/2014/main" id="{ACFBF79E-62D6-315B-5895-9D8DAC5F92A2}"/>
               </a:ext>
             </a:extLst>
           </p:cNvPr>
@@ -2216,7 +2216,7 @@
           <p:cNvPr id="5" name="スライド番号プレースホルダー 4">
             <a:extLst>
               <a:ext uri="{FF2B5EF4-FFF2-40B4-BE49-F238E27FC236}">
-                <a16:creationId xmlns:a16="http://schemas.microsoft.com/office/drawing/2014/main" id="{B82E4F02-0EB9-BC89-9019-B1B2A74EEEA0}"/>
+                <a16:creationId xmlns:a16="http://schemas.microsoft.com/office/drawing/2014/main" id="{8A21ED97-5595-CD17-BDD1-993B8D34C11C}"/>
               </a:ext>
             </a:extLst>
           </p:cNvPr>
@@ -2232,7 +2232,7 @@
           <a:bodyPr/>
           <a:lstStyle/>
           <a:p>
-            <a:fld id="{CC5904EF-0B9A-4A20-BCD2-8B47E413D5A6}" type="slidenum">
+            <a:fld id="{078D5B9E-33E3-4401-B5F2-B5E32A6F968F}" type="slidenum">
               <a:rPr kumimoji="1" lang="ja-JP" altLang="en-US" smtClean="0"/>
               <a:t>‹#›</a:t>
             </a:fld>
@@ -2243,7 +2243,7 @@
     </p:spTree>
     <p:extLst>
       <p:ext uri="{BB962C8B-B14F-4D97-AF65-F5344CB8AC3E}">
-        <p14:creationId xmlns:p14="http://schemas.microsoft.com/office/powerpoint/2010/main" val="1814629063"/>
+        <p14:creationId xmlns:p14="http://schemas.microsoft.com/office/powerpoint/2010/main" val="2403009130"/>
       </p:ext>
     </p:extLst>
   </p:cSld>
@@ -2275,7 +2275,7 @@
           <p:cNvPr id="2" name="日付プレースホルダー 1">
             <a:extLst>
               <a:ext uri="{FF2B5EF4-FFF2-40B4-BE49-F238E27FC236}">
-                <a16:creationId xmlns:a16="http://schemas.microsoft.com/office/drawing/2014/main" id="{1AD22D15-47C0-854D-2698-6BA69F8CCA86}"/>
+                <a16:creationId xmlns:a16="http://schemas.microsoft.com/office/drawing/2014/main" id="{7BC30A56-A486-E416-0100-F6416043C6FC}"/>
               </a:ext>
             </a:extLst>
           </p:cNvPr>
@@ -2291,7 +2291,7 @@
           <a:bodyPr/>
           <a:lstStyle/>
           <a:p>
-            <a:fld id="{AAF852AD-EAB3-48BD-B801-0CD2243833DC}" type="datetimeFigureOut">
+            <a:fld id="{9D13EAE5-BCC3-44E8-A4A9-507A19F88389}" type="datetimeFigureOut">
               <a:rPr kumimoji="1" lang="ja-JP" altLang="en-US" smtClean="0"/>
               <a:t>2026/7/30</a:t>
             </a:fld>
@@ -2304,7 +2304,7 @@
           <p:cNvPr id="3" name="フッター プレースホルダー 2">
             <a:extLst>
               <a:ext uri="{FF2B5EF4-FFF2-40B4-BE49-F238E27FC236}">
-                <a16:creationId xmlns:a16="http://schemas.microsoft.com/office/drawing/2014/main" id="{0DB484F2-5D7D-2A9B-50B8-2C6BD92D1999}"/>
+                <a16:creationId xmlns:a16="http://schemas.microsoft.com/office/drawing/2014/main" id="{263C5302-0DC3-B671-B23A-DE5FDFF609C0}"/>
               </a:ext>
             </a:extLst>
           </p:cNvPr>
@@ -2329,7 +2329,7 @@
           <p:cNvPr id="4" name="スライド番号プレースホルダー 3">
             <a:extLst>
               <a:ext uri="{FF2B5EF4-FFF2-40B4-BE49-F238E27FC236}">
-                <a16:creationId xmlns:a16="http://schemas.microsoft.com/office/drawing/2014/main" id="{952D3FB0-9D6B-EF65-5E9D-7F026C44CD7D}"/>
+                <a16:creationId xmlns:a16="http://schemas.microsoft.com/office/drawing/2014/main" id="{09A592A9-CE0A-F12B-FABC-0CD2BF814F7A}"/>
               </a:ext>
             </a:extLst>
           </p:cNvPr>
@@ -2345,7 +2345,7 @@
           <a:bodyPr/>
           <a:lstStyle/>
           <a:p>
-            <a:fld id="{CC5904EF-0B9A-4A20-BCD2-8B47E413D5A6}" type="slidenum">
+            <a:fld id="{078D5B9E-33E3-4401-B5F2-B5E32A6F968F}" type="slidenum">
               <a:rPr kumimoji="1" lang="ja-JP" altLang="en-US" smtClean="0"/>
               <a:t>‹#›</a:t>
             </a:fld>
@@ -2356,7 +2356,7 @@
     </p:spTree>
     <p:extLst>
       <p:ext uri="{BB962C8B-B14F-4D97-AF65-F5344CB8AC3E}">
-        <p14:creationId xmlns:p14="http://schemas.microsoft.com/office/powerpoint/2010/main" val="444914555"/>
+        <p14:creationId xmlns:p14="http://schemas.microsoft.com/office/powerpoint/2010/main" val="2294523569"/>
       </p:ext>
     </p:extLst>
   </p:cSld>
@@ -2388,7 +2388,7 @@
           <p:cNvPr id="2" name="タイトル 1">
             <a:extLst>
               <a:ext uri="{FF2B5EF4-FFF2-40B4-BE49-F238E27FC236}">
-                <a16:creationId xmlns:a16="http://schemas.microsoft.com/office/drawing/2014/main" id="{D490DBD2-7F00-D6EA-8565-F25DBA254E36}"/>
+                <a16:creationId xmlns:a16="http://schemas.microsoft.com/office/drawing/2014/main" id="{88FC1D30-7E59-794C-A282-981FB94F8804}"/>
               </a:ext>
             </a:extLst>
           </p:cNvPr>
@@ -2425,7 +2425,7 @@
           <p:cNvPr id="3" name="コンテンツ プレースホルダー 2">
             <a:extLst>
               <a:ext uri="{FF2B5EF4-FFF2-40B4-BE49-F238E27FC236}">
-                <a16:creationId xmlns:a16="http://schemas.microsoft.com/office/drawing/2014/main" id="{882D0BD8-9C57-35D8-FA13-F6C347BE6854}"/>
+                <a16:creationId xmlns:a16="http://schemas.microsoft.com/office/drawing/2014/main" id="{8266798E-2702-C682-686B-9F209B5CDB90}"/>
               </a:ext>
             </a:extLst>
           </p:cNvPr>
@@ -2547,7 +2547,7 @@
           <p:cNvPr id="4" name="テキスト プレースホルダー 3">
             <a:extLst>
               <a:ext uri="{FF2B5EF4-FFF2-40B4-BE49-F238E27FC236}">
-                <a16:creationId xmlns:a16="http://schemas.microsoft.com/office/drawing/2014/main" id="{AB644D5F-3767-EA55-1B5D-2A01DED9FE50}"/>
+                <a16:creationId xmlns:a16="http://schemas.microsoft.com/office/drawing/2014/main" id="{4F536DFC-383A-4626-1B49-232C0F2EDBED}"/>
               </a:ext>
             </a:extLst>
           </p:cNvPr>
@@ -2618,7 +2618,7 @@
           <p:cNvPr id="5" name="日付プレースホルダー 4">
             <a:extLst>
               <a:ext uri="{FF2B5EF4-FFF2-40B4-BE49-F238E27FC236}">
-                <a16:creationId xmlns:a16="http://schemas.microsoft.com/office/drawing/2014/main" id="{5B095A8F-2F28-CAD4-D7E9-5449CD64A13F}"/>
+                <a16:creationId xmlns:a16="http://schemas.microsoft.com/office/drawing/2014/main" id="{075DD940-C81A-C07C-E708-A3C1F87753FA}"/>
               </a:ext>
             </a:extLst>
           </p:cNvPr>
@@ -2634,7 +2634,7 @@
           <a:bodyPr/>
           <a:lstStyle/>
           <a:p>
-            <a:fld id="{AAF852AD-EAB3-48BD-B801-0CD2243833DC}" type="datetimeFigureOut">
+            <a:fld id="{9D13EAE5-BCC3-44E8-A4A9-507A19F88389}" type="datetimeFigureOut">
               <a:rPr kumimoji="1" lang="ja-JP" altLang="en-US" smtClean="0"/>
               <a:t>2026/7/30</a:t>
             </a:fld>
@@ -2647,7 +2647,7 @@
           <p:cNvPr id="6" name="フッター プレースホルダー 5">
             <a:extLst>
               <a:ext uri="{FF2B5EF4-FFF2-40B4-BE49-F238E27FC236}">
-                <a16:creationId xmlns:a16="http://schemas.microsoft.com/office/drawing/2014/main" id="{46B8210A-A530-7562-8042-4287E218DCA3}"/>
+                <a16:creationId xmlns:a16="http://schemas.microsoft.com/office/drawing/2014/main" id="{82AEBAB1-6190-BDC0-9B92-C118F6CBF3E9}"/>
               </a:ext>
             </a:extLst>
           </p:cNvPr>
@@ -2672,7 +2672,7 @@
           <p:cNvPr id="7" name="スライド番号プレースホルダー 6">
             <a:extLst>
               <a:ext uri="{FF2B5EF4-FFF2-40B4-BE49-F238E27FC236}">
-                <a16:creationId xmlns:a16="http://schemas.microsoft.com/office/drawing/2014/main" id="{0A91B8C1-C1B9-2AC8-C3D4-60BAB4579C62}"/>
+                <a16:creationId xmlns:a16="http://schemas.microsoft.com/office/drawing/2014/main" id="{9FBC38D2-0871-24A7-3A3A-051981A77952}"/>
               </a:ext>
             </a:extLst>
           </p:cNvPr>
@@ -2688,7 +2688,7 @@
           <a:bodyPr/>
           <a:lstStyle/>
           <a:p>
-            <a:fld id="{CC5904EF-0B9A-4A20-BCD2-8B47E413D5A6}" type="slidenum">
+            <a:fld id="{078D5B9E-33E3-4401-B5F2-B5E32A6F968F}" type="slidenum">
               <a:rPr kumimoji="1" lang="ja-JP" altLang="en-US" smtClean="0"/>
               <a:t>‹#›</a:t>
             </a:fld>
@@ -2699,7 +2699,7 @@
     </p:spTree>
     <p:extLst>
       <p:ext uri="{BB962C8B-B14F-4D97-AF65-F5344CB8AC3E}">
-        <p14:creationId xmlns:p14="http://schemas.microsoft.com/office/powerpoint/2010/main" val="2876123558"/>
+        <p14:creationId xmlns:p14="http://schemas.microsoft.com/office/powerpoint/2010/main" val="3515871745"/>
       </p:ext>
     </p:extLst>
   </p:cSld>
@@ -2731,7 +2731,7 @@
           <p:cNvPr id="2" name="タイトル 1">
             <a:extLst>
               <a:ext uri="{FF2B5EF4-FFF2-40B4-BE49-F238E27FC236}">
-                <a16:creationId xmlns:a16="http://schemas.microsoft.com/office/drawing/2014/main" id="{7C7A34BD-C03F-4527-C41B-E2C2A4E6B5F4}"/>
+                <a16:creationId xmlns:a16="http://schemas.microsoft.com/office/drawing/2014/main" id="{D1F13964-728C-7E2D-661B-B74E84A084BB}"/>
               </a:ext>
             </a:extLst>
           </p:cNvPr>
@@ -2768,7 +2768,7 @@
           <p:cNvPr id="3" name="図プレースホルダー 2">
             <a:extLst>
               <a:ext uri="{FF2B5EF4-FFF2-40B4-BE49-F238E27FC236}">
-                <a16:creationId xmlns:a16="http://schemas.microsoft.com/office/drawing/2014/main" id="{33F31363-CB7E-2889-1709-1E5355EE58B1}"/>
+                <a16:creationId xmlns:a16="http://schemas.microsoft.com/office/drawing/2014/main" id="{FF6D0E92-051F-FF8C-A392-33539BE36D4D}"/>
               </a:ext>
             </a:extLst>
           </p:cNvPr>
@@ -2835,7 +2835,7 @@
           <p:cNvPr id="4" name="テキスト プレースホルダー 3">
             <a:extLst>
               <a:ext uri="{FF2B5EF4-FFF2-40B4-BE49-F238E27FC236}">
-                <a16:creationId xmlns:a16="http://schemas.microsoft.com/office/drawing/2014/main" id="{3794BA5E-DEA8-1A6E-138B-C3BC3F553597}"/>
+                <a16:creationId xmlns:a16="http://schemas.microsoft.com/office/drawing/2014/main" id="{B01EE929-598D-F136-6B58-789E550119A8}"/>
               </a:ext>
             </a:extLst>
           </p:cNvPr>
@@ -2906,7 +2906,7 @@
           <p:cNvPr id="5" name="日付プレースホルダー 4">
             <a:extLst>
               <a:ext uri="{FF2B5EF4-FFF2-40B4-BE49-F238E27FC236}">
-                <a16:creationId xmlns:a16="http://schemas.microsoft.com/office/drawing/2014/main" id="{48AB8E09-EEEF-B883-9ED9-1FFD5A13DE8E}"/>
+                <a16:creationId xmlns:a16="http://schemas.microsoft.com/office/drawing/2014/main" id="{579C385E-2695-2189-4434-2392DDCEFE4F}"/>
               </a:ext>
             </a:extLst>
           </p:cNvPr>
@@ -2922,7 +2922,7 @@
           <a:bodyPr/>
           <a:lstStyle/>
           <a:p>
-            <a:fld id="{AAF852AD-EAB3-48BD-B801-0CD2243833DC}" type="datetimeFigureOut">
+            <a:fld id="{9D13EAE5-BCC3-44E8-A4A9-507A19F88389}" type="datetimeFigureOut">
               <a:rPr kumimoji="1" lang="ja-JP" altLang="en-US" smtClean="0"/>
               <a:t>2026/7/30</a:t>
             </a:fld>
@@ -2935,7 +2935,7 @@
           <p:cNvPr id="6" name="フッター プレースホルダー 5">
             <a:extLst>
               <a:ext uri="{FF2B5EF4-FFF2-40B4-BE49-F238E27FC236}">
-                <a16:creationId xmlns:a16="http://schemas.microsoft.com/office/drawing/2014/main" id="{6B70D3CA-91FC-DDF9-4359-E7A457058770}"/>
+                <a16:creationId xmlns:a16="http://schemas.microsoft.com/office/drawing/2014/main" id="{D368972B-6641-630E-2C0E-27ED26A422D8}"/>
               </a:ext>
             </a:extLst>
           </p:cNvPr>
@@ -2960,7 +2960,7 @@
           <p:cNvPr id="7" name="スライド番号プレースホルダー 6">
             <a:extLst>
               <a:ext uri="{FF2B5EF4-FFF2-40B4-BE49-F238E27FC236}">
-                <a16:creationId xmlns:a16="http://schemas.microsoft.com/office/drawing/2014/main" id="{3D6D6427-6688-3D04-90EC-61B4A528BCF9}"/>
+                <a16:creationId xmlns:a16="http://schemas.microsoft.com/office/drawing/2014/main" id="{06497F30-C5B5-1D03-E981-6EE441B3D2A8}"/>
               </a:ext>
             </a:extLst>
           </p:cNvPr>
@@ -2976,7 +2976,7 @@
           <a:bodyPr/>
           <a:lstStyle/>
           <a:p>
-            <a:fld id="{CC5904EF-0B9A-4A20-BCD2-8B47E413D5A6}" type="slidenum">
+            <a:fld id="{078D5B9E-33E3-4401-B5F2-B5E32A6F968F}" type="slidenum">
               <a:rPr kumimoji="1" lang="ja-JP" altLang="en-US" smtClean="0"/>
               <a:t>‹#›</a:t>
             </a:fld>
@@ -2987,7 +2987,7 @@
     </p:spTree>
     <p:extLst>
       <p:ext uri="{BB962C8B-B14F-4D97-AF65-F5344CB8AC3E}">
-        <p14:creationId xmlns:p14="http://schemas.microsoft.com/office/powerpoint/2010/main" val="2325738407"/>
+        <p14:creationId xmlns:p14="http://schemas.microsoft.com/office/powerpoint/2010/main" val="2136245204"/>
       </p:ext>
     </p:extLst>
   </p:cSld>
@@ -3024,7 +3024,7 @@
           <p:cNvPr id="2" name="タイトル プレースホルダー 1">
             <a:extLst>
               <a:ext uri="{FF2B5EF4-FFF2-40B4-BE49-F238E27FC236}">
-                <a16:creationId xmlns:a16="http://schemas.microsoft.com/office/drawing/2014/main" id="{43FF201A-7092-D794-3768-96EA1D622D1D}"/>
+                <a16:creationId xmlns:a16="http://schemas.microsoft.com/office/drawing/2014/main" id="{559B559F-FAB8-7454-A924-24FF1192F731}"/>
               </a:ext>
             </a:extLst>
           </p:cNvPr>
@@ -3062,7 +3062,7 @@
           <p:cNvPr id="3" name="テキスト プレースホルダー 2">
             <a:extLst>
               <a:ext uri="{FF2B5EF4-FFF2-40B4-BE49-F238E27FC236}">
-                <a16:creationId xmlns:a16="http://schemas.microsoft.com/office/drawing/2014/main" id="{DF720F4D-2C7D-8D6A-8BE0-A71696E5B02B}"/>
+                <a16:creationId xmlns:a16="http://schemas.microsoft.com/office/drawing/2014/main" id="{3EC9C1AF-24DA-2958-915F-63A644C7907D}"/>
               </a:ext>
             </a:extLst>
           </p:cNvPr>
@@ -3161,7 +3161,7 @@
           <p:cNvPr id="4" name="日付プレースホルダー 3">
             <a:extLst>
               <a:ext uri="{FF2B5EF4-FFF2-40B4-BE49-F238E27FC236}">
-                <a16:creationId xmlns:a16="http://schemas.microsoft.com/office/drawing/2014/main" id="{40E0616A-BBD6-9467-C408-F8E98D9EEF77}"/>
+                <a16:creationId xmlns:a16="http://schemas.microsoft.com/office/drawing/2014/main" id="{EBBCAFE2-79DD-43CF-F83A-319AA0403DB5}"/>
               </a:ext>
             </a:extLst>
           </p:cNvPr>
@@ -3195,7 +3195,7 @@
             </a:lvl1pPr>
           </a:lstStyle>
           <a:p>
-            <a:fld id="{AAF852AD-EAB3-48BD-B801-0CD2243833DC}" type="datetimeFigureOut">
+            <a:fld id="{9D13EAE5-BCC3-44E8-A4A9-507A19F88389}" type="datetimeFigureOut">
               <a:rPr kumimoji="1" lang="ja-JP" altLang="en-US" smtClean="0"/>
               <a:t>2026/7/30</a:t>
             </a:fld>
@@ -3208,7 +3208,7 @@
           <p:cNvPr id="5" name="フッター プレースホルダー 4">
             <a:extLst>
               <a:ext uri="{FF2B5EF4-FFF2-40B4-BE49-F238E27FC236}">
-                <a16:creationId xmlns:a16="http://schemas.microsoft.com/office/drawing/2014/main" id="{FE768C7D-A331-F1E3-92CC-E2ED28CE3396}"/>
+                <a16:creationId xmlns:a16="http://schemas.microsoft.com/office/drawing/2014/main" id="{5DB6C441-9713-AB27-4728-0F615F8ED7C0}"/>
               </a:ext>
             </a:extLst>
           </p:cNvPr>
@@ -3251,7 +3251,7 @@
           <p:cNvPr id="6" name="スライド番号プレースホルダー 5">
             <a:extLst>
               <a:ext uri="{FF2B5EF4-FFF2-40B4-BE49-F238E27FC236}">
-                <a16:creationId xmlns:a16="http://schemas.microsoft.com/office/drawing/2014/main" id="{B14D326D-EC63-E13D-0A39-AB9FEF08FC48}"/>
+                <a16:creationId xmlns:a16="http://schemas.microsoft.com/office/drawing/2014/main" id="{301AD105-908F-BC0C-42B6-43FB0DC83731}"/>
               </a:ext>
             </a:extLst>
           </p:cNvPr>
@@ -3285,7 +3285,7 @@
             </a:lvl1pPr>
           </a:lstStyle>
           <a:p>
-            <a:fld id="{CC5904EF-0B9A-4A20-BCD2-8B47E413D5A6}" type="slidenum">
+            <a:fld id="{078D5B9E-33E3-4401-B5F2-B5E32A6F968F}" type="slidenum">
               <a:rPr kumimoji="1" lang="ja-JP" altLang="en-US" smtClean="0"/>
               <a:t>‹#›</a:t>
             </a:fld>
@@ -3296,7 +3296,7 @@
     </p:spTree>
     <p:extLst>
       <p:ext uri="{BB962C8B-B14F-4D97-AF65-F5344CB8AC3E}">
-        <p14:creationId xmlns:p14="http://schemas.microsoft.com/office/powerpoint/2010/main" val="3347033846"/>
+        <p14:creationId xmlns:p14="http://schemas.microsoft.com/office/powerpoint/2010/main" val="2194409589"/>
       </p:ext>
     </p:extLst>
   </p:cSld>
@@ -3619,7 +3619,7 @@
           <p:cNvPr id="2" name="テキスト ボックス 1">
             <a:extLst>
               <a:ext uri="{FF2B5EF4-FFF2-40B4-BE49-F238E27FC236}">
-                <a16:creationId xmlns:a16="http://schemas.microsoft.com/office/drawing/2014/main" id="{3D9878CC-BE5E-1E21-F5B1-7FF06D2D542B}"/>
+                <a16:creationId xmlns:a16="http://schemas.microsoft.com/office/drawing/2014/main" id="{71F3CEEF-372B-A092-6B62-CCB72B2566CF}"/>
               </a:ext>
             </a:extLst>
           </p:cNvPr>
@@ -3665,7 +3665,7 @@
           <p:cNvPr id="3" name="テキスト ボックス 2">
             <a:extLst>
               <a:ext uri="{FF2B5EF4-FFF2-40B4-BE49-F238E27FC236}">
-                <a16:creationId xmlns:a16="http://schemas.microsoft.com/office/drawing/2014/main" id="{7A29AEB8-2A75-BEA5-F1FC-2EA432B06F92}"/>
+                <a16:creationId xmlns:a16="http://schemas.microsoft.com/office/drawing/2014/main" id="{E21BC7E3-2F31-F412-5CBD-18ACDEC5FF3C}"/>
               </a:ext>
             </a:extLst>
           </p:cNvPr>
@@ -3714,7 +3714,7 @@
           <p:cNvPr id="4" name="テキスト ボックス 3">
             <a:extLst>
               <a:ext uri="{FF2B5EF4-FFF2-40B4-BE49-F238E27FC236}">
-                <a16:creationId xmlns:a16="http://schemas.microsoft.com/office/drawing/2014/main" id="{962977ED-664C-6EE4-DD6D-74C7E414B6A6}"/>
+                <a16:creationId xmlns:a16="http://schemas.microsoft.com/office/drawing/2014/main" id="{E15DEC96-8B9C-2886-D9C1-2A24A1EBF23F}"/>
               </a:ext>
             </a:extLst>
           </p:cNvPr>
@@ -3754,7 +3754,7 @@
           <p:cNvPr id="5" name="テキスト ボックス 4">
             <a:extLst>
               <a:ext uri="{FF2B5EF4-FFF2-40B4-BE49-F238E27FC236}">
-                <a16:creationId xmlns:a16="http://schemas.microsoft.com/office/drawing/2014/main" id="{67727BC6-6864-F9A7-ADAE-759E1638B0DA}"/>
+                <a16:creationId xmlns:a16="http://schemas.microsoft.com/office/drawing/2014/main" id="{85BE0AE8-A994-52AF-C410-9EFD59F1EBD6}"/>
               </a:ext>
             </a:extLst>
           </p:cNvPr>
@@ -3801,7 +3801,7 @@
             <a:hlinkClick r:id="" action="ppaction://media"/>
             <a:extLst>
               <a:ext uri="{FF2B5EF4-FFF2-40B4-BE49-F238E27FC236}">
-                <a16:creationId xmlns:a16="http://schemas.microsoft.com/office/drawing/2014/main" id="{6A5E1EB9-4AF8-C6E2-03E4-78811B1C1EA4}"/>
+                <a16:creationId xmlns:a16="http://schemas.microsoft.com/office/drawing/2014/main" id="{3BAE6F78-B9DD-2257-E00F-2B265088CCBA}"/>
               </a:ext>
             </a:extLst>
           </p:cNvPr>
@@ -3836,7 +3836,7 @@
     </p:spTree>
     <p:extLst>
       <p:ext uri="{BB962C8B-B14F-4D97-AF65-F5344CB8AC3E}">
-        <p14:creationId xmlns:p14="http://schemas.microsoft.com/office/powerpoint/2010/main" val="339110834"/>
+        <p14:creationId xmlns:p14="http://schemas.microsoft.com/office/powerpoint/2010/main" val="3884222510"/>
       </p:ext>
     </p:extLst>
   </p:cSld>
@@ -3960,7 +3960,7 @@
           <p:cNvPr id="2" name="テキスト ボックス 1">
             <a:extLst>
               <a:ext uri="{FF2B5EF4-FFF2-40B4-BE49-F238E27FC236}">
-                <a16:creationId xmlns:a16="http://schemas.microsoft.com/office/drawing/2014/main" id="{649E9AFD-86B4-DA5D-58B1-5F2649CD9933}"/>
+                <a16:creationId xmlns:a16="http://schemas.microsoft.com/office/drawing/2014/main" id="{E0A49526-6443-A03A-3856-58629ACDDDCC}"/>
               </a:ext>
             </a:extLst>
           </p:cNvPr>
@@ -4006,7 +4006,7 @@
           <p:cNvPr id="3" name="テキスト ボックス 2">
             <a:extLst>
               <a:ext uri="{FF2B5EF4-FFF2-40B4-BE49-F238E27FC236}">
-                <a16:creationId xmlns:a16="http://schemas.microsoft.com/office/drawing/2014/main" id="{ED2C9E88-6176-1744-5795-A7CAF37144E8}"/>
+                <a16:creationId xmlns:a16="http://schemas.microsoft.com/office/drawing/2014/main" id="{14BB2C43-00C0-9071-D621-5DF1E8F4E80F}"/>
               </a:ext>
             </a:extLst>
           </p:cNvPr>
@@ -4046,7 +4046,7 @@
           <p:cNvPr id="4" name="テキスト ボックス 3">
             <a:extLst>
               <a:ext uri="{FF2B5EF4-FFF2-40B4-BE49-F238E27FC236}">
-                <a16:creationId xmlns:a16="http://schemas.microsoft.com/office/drawing/2014/main" id="{4C8F0409-967C-C1D4-59E7-8BBDF46DA6EC}"/>
+                <a16:creationId xmlns:a16="http://schemas.microsoft.com/office/drawing/2014/main" id="{4A70DB6A-BEF9-4B98-BEF7-BBCB7614175B}"/>
               </a:ext>
             </a:extLst>
           </p:cNvPr>
@@ -4110,7 +4110,7 @@
           <p:cNvPr id="5" name="テキスト ボックス 4">
             <a:extLst>
               <a:ext uri="{FF2B5EF4-FFF2-40B4-BE49-F238E27FC236}">
-                <a16:creationId xmlns:a16="http://schemas.microsoft.com/office/drawing/2014/main" id="{DDC6B7AC-7201-62B6-7D2C-AD7F001CCC64}"/>
+                <a16:creationId xmlns:a16="http://schemas.microsoft.com/office/drawing/2014/main" id="{AB4122C8-3F56-CCE9-35E0-32E8294C5B98}"/>
               </a:ext>
             </a:extLst>
           </p:cNvPr>
@@ -4157,7 +4157,7 @@
             <a:hlinkClick r:id="" action="ppaction://media"/>
             <a:extLst>
               <a:ext uri="{FF2B5EF4-FFF2-40B4-BE49-F238E27FC236}">
-                <a16:creationId xmlns:a16="http://schemas.microsoft.com/office/drawing/2014/main" id="{A042C0F5-42DA-88AE-A9AA-B16387087022}"/>
+                <a16:creationId xmlns:a16="http://schemas.microsoft.com/office/drawing/2014/main" id="{3A6A9A7C-4160-6126-0980-35D45592F6BF}"/>
               </a:ext>
             </a:extLst>
           </p:cNvPr>
@@ -4192,7 +4192,7 @@
     </p:spTree>
     <p:extLst>
       <p:ext uri="{BB962C8B-B14F-4D97-AF65-F5344CB8AC3E}">
-        <p14:creationId xmlns:p14="http://schemas.microsoft.com/office/powerpoint/2010/main" val="2908238702"/>
+        <p14:creationId xmlns:p14="http://schemas.microsoft.com/office/powerpoint/2010/main" val="4253349612"/>
       </p:ext>
     </p:extLst>
   </p:cSld>
@@ -4316,7 +4316,7 @@
           <p:cNvPr id="2" name="テキスト ボックス 1">
             <a:extLst>
               <a:ext uri="{FF2B5EF4-FFF2-40B4-BE49-F238E27FC236}">
-                <a16:creationId xmlns:a16="http://schemas.microsoft.com/office/drawing/2014/main" id="{0C1EE1D6-F852-C412-EBFE-5C1FCB1DC4FA}"/>
+                <a16:creationId xmlns:a16="http://schemas.microsoft.com/office/drawing/2014/main" id="{2493E68C-CE35-F5C6-3CE2-390D6CABEEC2}"/>
               </a:ext>
             </a:extLst>
           </p:cNvPr>
@@ -4362,7 +4362,7 @@
           <p:cNvPr id="3" name="テキスト ボックス 2">
             <a:extLst>
               <a:ext uri="{FF2B5EF4-FFF2-40B4-BE49-F238E27FC236}">
-                <a16:creationId xmlns:a16="http://schemas.microsoft.com/office/drawing/2014/main" id="{53998C82-1139-32EF-5847-992DED18D786}"/>
+                <a16:creationId xmlns:a16="http://schemas.microsoft.com/office/drawing/2014/main" id="{DE02CE5F-1FF1-6796-57CC-770557351D64}"/>
               </a:ext>
             </a:extLst>
           </p:cNvPr>
@@ -4402,7 +4402,7 @@
           <p:cNvPr id="4" name="テキスト ボックス 3">
             <a:extLst>
               <a:ext uri="{FF2B5EF4-FFF2-40B4-BE49-F238E27FC236}">
-                <a16:creationId xmlns:a16="http://schemas.microsoft.com/office/drawing/2014/main" id="{B1A89660-794B-CF19-C4AA-886CC934062B}"/>
+                <a16:creationId xmlns:a16="http://schemas.microsoft.com/office/drawing/2014/main" id="{1904E12A-C848-D7BF-F844-FEF304087439}"/>
               </a:ext>
             </a:extLst>
           </p:cNvPr>
@@ -4497,7 +4497,7 @@
           <p:cNvPr id="5" name="テキスト ボックス 4">
             <a:extLst>
               <a:ext uri="{FF2B5EF4-FFF2-40B4-BE49-F238E27FC236}">
-                <a16:creationId xmlns:a16="http://schemas.microsoft.com/office/drawing/2014/main" id="{0AFE8186-29B9-0551-7437-4CBDCDAF9C35}"/>
+                <a16:creationId xmlns:a16="http://schemas.microsoft.com/office/drawing/2014/main" id="{06D9A699-1B8D-F84D-EB7F-ED8531ABD4A8}"/>
               </a:ext>
             </a:extLst>
           </p:cNvPr>
@@ -4544,7 +4544,7 @@
             <a:hlinkClick r:id="" action="ppaction://media"/>
             <a:extLst>
               <a:ext uri="{FF2B5EF4-FFF2-40B4-BE49-F238E27FC236}">
-                <a16:creationId xmlns:a16="http://schemas.microsoft.com/office/drawing/2014/main" id="{125D6259-99E0-DD39-DDE0-92BA53A9A87D}"/>
+                <a16:creationId xmlns:a16="http://schemas.microsoft.com/office/drawing/2014/main" id="{0A8B9458-A194-D174-F1FF-C21CD5A5F170}"/>
               </a:ext>
             </a:extLst>
           </p:cNvPr>
@@ -4579,7 +4579,7 @@
     </p:spTree>
     <p:extLst>
       <p:ext uri="{BB962C8B-B14F-4D97-AF65-F5344CB8AC3E}">
-        <p14:creationId xmlns:p14="http://schemas.microsoft.com/office/powerpoint/2010/main" val="717265042"/>
+        <p14:creationId xmlns:p14="http://schemas.microsoft.com/office/powerpoint/2010/main" val="2247885219"/>
       </p:ext>
     </p:extLst>
   </p:cSld>
@@ -4703,7 +4703,7 @@
           <p:cNvPr id="2" name="テキスト ボックス 1">
             <a:extLst>
               <a:ext uri="{FF2B5EF4-FFF2-40B4-BE49-F238E27FC236}">
-                <a16:creationId xmlns:a16="http://schemas.microsoft.com/office/drawing/2014/main" id="{48E18C11-A899-672F-DA91-423B0833BCF0}"/>
+                <a16:creationId xmlns:a16="http://schemas.microsoft.com/office/drawing/2014/main" id="{EE4AC724-BF1F-5D4C-4650-EFDD7C34A5D1}"/>
               </a:ext>
             </a:extLst>
           </p:cNvPr>
@@ -4749,7 +4749,7 @@
           <p:cNvPr id="3" name="テキスト ボックス 2">
             <a:extLst>
               <a:ext uri="{FF2B5EF4-FFF2-40B4-BE49-F238E27FC236}">
-                <a16:creationId xmlns:a16="http://schemas.microsoft.com/office/drawing/2014/main" id="{F1016FC5-E6EA-F47F-DA48-5F7D995C11C4}"/>
+                <a16:creationId xmlns:a16="http://schemas.microsoft.com/office/drawing/2014/main" id="{7FA144D9-5931-F959-B2F6-A9A2CA7CC77D}"/>
               </a:ext>
             </a:extLst>
           </p:cNvPr>
@@ -4789,7 +4789,7 @@
           <p:cNvPr id="4" name="テキスト ボックス 3">
             <a:extLst>
               <a:ext uri="{FF2B5EF4-FFF2-40B4-BE49-F238E27FC236}">
-                <a16:creationId xmlns:a16="http://schemas.microsoft.com/office/drawing/2014/main" id="{E768C6BE-B645-9510-A5D7-5CB98095430E}"/>
+                <a16:creationId xmlns:a16="http://schemas.microsoft.com/office/drawing/2014/main" id="{74ABD143-DEB3-1BC9-5D81-FEE83C79647F}"/>
               </a:ext>
             </a:extLst>
           </p:cNvPr>
@@ -4899,7 +4899,7 @@
           <p:cNvPr id="5" name="テキスト ボックス 4">
             <a:extLst>
               <a:ext uri="{FF2B5EF4-FFF2-40B4-BE49-F238E27FC236}">
-                <a16:creationId xmlns:a16="http://schemas.microsoft.com/office/drawing/2014/main" id="{FCC787E2-CBCB-988D-1734-05508BCF445D}"/>
+                <a16:creationId xmlns:a16="http://schemas.microsoft.com/office/drawing/2014/main" id="{B3ECC8E4-656A-1F37-55FA-520A598DCC7A}"/>
               </a:ext>
             </a:extLst>
           </p:cNvPr>
@@ -4946,7 +4946,7 @@
             <a:hlinkClick r:id="" action="ppaction://media"/>
             <a:extLst>
               <a:ext uri="{FF2B5EF4-FFF2-40B4-BE49-F238E27FC236}">
-                <a16:creationId xmlns:a16="http://schemas.microsoft.com/office/drawing/2014/main" id="{45DA3937-B0BB-1896-D473-6446C5BEBF1D}"/>
+                <a16:creationId xmlns:a16="http://schemas.microsoft.com/office/drawing/2014/main" id="{E7F38C78-6FCA-B87D-544C-4936CB445F34}"/>
               </a:ext>
             </a:extLst>
           </p:cNvPr>
@@ -4981,7 +4981,7 @@
     </p:spTree>
     <p:extLst>
       <p:ext uri="{BB962C8B-B14F-4D97-AF65-F5344CB8AC3E}">
-        <p14:creationId xmlns:p14="http://schemas.microsoft.com/office/powerpoint/2010/main" val="523259314"/>
+        <p14:creationId xmlns:p14="http://schemas.microsoft.com/office/powerpoint/2010/main" val="251057049"/>
       </p:ext>
     </p:extLst>
   </p:cSld>
@@ -5105,7 +5105,7 @@
           <p:cNvPr id="2" name="テキスト ボックス 1">
             <a:extLst>
               <a:ext uri="{FF2B5EF4-FFF2-40B4-BE49-F238E27FC236}">
-                <a16:creationId xmlns:a16="http://schemas.microsoft.com/office/drawing/2014/main" id="{51296EA8-54B3-C5E4-CD22-0A16BB3A8168}"/>
+                <a16:creationId xmlns:a16="http://schemas.microsoft.com/office/drawing/2014/main" id="{3C8434BF-E30D-12C2-A993-70C4296B3726}"/>
               </a:ext>
             </a:extLst>
           </p:cNvPr>
@@ -5151,7 +5151,7 @@
           <p:cNvPr id="3" name="テキスト ボックス 2">
             <a:extLst>
               <a:ext uri="{FF2B5EF4-FFF2-40B4-BE49-F238E27FC236}">
-                <a16:creationId xmlns:a16="http://schemas.microsoft.com/office/drawing/2014/main" id="{09FFDD7E-AD45-3CCF-00D3-BFC750D87FFC}"/>
+                <a16:creationId xmlns:a16="http://schemas.microsoft.com/office/drawing/2014/main" id="{22FC8493-24E6-B58F-B54D-0D506E342D2A}"/>
               </a:ext>
             </a:extLst>
           </p:cNvPr>
@@ -5191,7 +5191,7 @@
           <p:cNvPr id="4" name="テキスト ボックス 3">
             <a:extLst>
               <a:ext uri="{FF2B5EF4-FFF2-40B4-BE49-F238E27FC236}">
-                <a16:creationId xmlns:a16="http://schemas.microsoft.com/office/drawing/2014/main" id="{731B7EE2-4483-A0D5-9D1E-726EEA1B4F15}"/>
+                <a16:creationId xmlns:a16="http://schemas.microsoft.com/office/drawing/2014/main" id="{CBEAA3F8-37AA-58A9-0D1B-F47990725419}"/>
               </a:ext>
             </a:extLst>
           </p:cNvPr>
@@ -5215,20 +5215,14 @@
           <a:lstStyle/>
           <a:p>
             <a:r>
-              <a:rPr kumimoji="1" lang="en-US" altLang="ja-JP" sz="2000">
+              <a:rPr kumimoji="1" lang="ja-JP" altLang="en-US" sz="2000">
                 <a:solidFill>
                   <a:srgbClr val="333333"/>
                 </a:solidFill>
                 <a:latin typeface="Arial" panose="020B0604020202020204" pitchFamily="34" charset="0"/>
               </a:rPr>
-              <a:t>Set confirmed custom domain</a:t>
-            </a:r>
-            <a:endParaRPr kumimoji="1" lang="ja-JP" altLang="en-US" sz="2000">
-              <a:solidFill>
-                <a:srgbClr val="333333"/>
-              </a:solidFill>
-              <a:latin typeface="Arial" panose="020B0604020202020204" pitchFamily="34" charset="0"/>
-            </a:endParaRPr>
+              <a:t>直近のコミットでは、実装の見直しと継続的な改善が行われました。</a:t>
+            </a:r>
           </a:p>
         </p:txBody>
       </p:sp>
@@ -5237,7 +5231,7 @@
           <p:cNvPr id="5" name="テキスト ボックス 4">
             <a:extLst>
               <a:ext uri="{FF2B5EF4-FFF2-40B4-BE49-F238E27FC236}">
-                <a16:creationId xmlns:a16="http://schemas.microsoft.com/office/drawing/2014/main" id="{3333C187-726D-AF23-AF72-B718082735D1}"/>
+                <a16:creationId xmlns:a16="http://schemas.microsoft.com/office/drawing/2014/main" id="{88225C43-2E12-9EF5-374C-1F6234ED5FE1}"/>
               </a:ext>
             </a:extLst>
           </p:cNvPr>
@@ -5284,7 +5278,7 @@
             <a:hlinkClick r:id="" action="ppaction://media"/>
             <a:extLst>
               <a:ext uri="{FF2B5EF4-FFF2-40B4-BE49-F238E27FC236}">
-                <a16:creationId xmlns:a16="http://schemas.microsoft.com/office/drawing/2014/main" id="{E09A024B-36D2-5444-9E4F-09E06F12EDB0}"/>
+                <a16:creationId xmlns:a16="http://schemas.microsoft.com/office/drawing/2014/main" id="{B8CB94C1-FB3A-9CEB-C8E3-306FA47B6853}"/>
               </a:ext>
             </a:extLst>
           </p:cNvPr>
@@ -5319,7 +5313,7 @@
     </p:spTree>
     <p:extLst>
       <p:ext uri="{BB962C8B-B14F-4D97-AF65-F5344CB8AC3E}">
-        <p14:creationId xmlns:p14="http://schemas.microsoft.com/office/powerpoint/2010/main" val="3420496854"/>
+        <p14:creationId xmlns:p14="http://schemas.microsoft.com/office/powerpoint/2010/main" val="3418328395"/>
       </p:ext>
     </p:extLst>
   </p:cSld>
@@ -5362,7 +5356,7 @@
                                   <p:childTnLst>
                                     <p:cmd type="call" cmd="playFrom(0.0)">
                                       <p:cBhvr>
-                                        <p:cTn id="6" dur="6451" fill="hold"/>
+                                        <p:cTn id="6" dur="6076" fill="hold"/>
                                         <p:tgtEl>
                                           <p:spTgt spid="6"/>
                                         </p:tgtEl>
@@ -5443,7 +5437,7 @@
           <p:cNvPr id="2" name="テキスト ボックス 1">
             <a:extLst>
               <a:ext uri="{FF2B5EF4-FFF2-40B4-BE49-F238E27FC236}">
-                <a16:creationId xmlns:a16="http://schemas.microsoft.com/office/drawing/2014/main" id="{1BBD4487-CF70-6B73-817A-FED2944C43BD}"/>
+                <a16:creationId xmlns:a16="http://schemas.microsoft.com/office/drawing/2014/main" id="{5CE5124D-55F0-50B8-F94F-F48CCF303A88}"/>
               </a:ext>
             </a:extLst>
           </p:cNvPr>
@@ -5489,7 +5483,7 @@
           <p:cNvPr id="3" name="テキスト ボックス 2">
             <a:extLst>
               <a:ext uri="{FF2B5EF4-FFF2-40B4-BE49-F238E27FC236}">
-                <a16:creationId xmlns:a16="http://schemas.microsoft.com/office/drawing/2014/main" id="{A134BEEC-055F-D878-149A-98B0D9DCB0B2}"/>
+                <a16:creationId xmlns:a16="http://schemas.microsoft.com/office/drawing/2014/main" id="{C5EA2A9C-28BC-0726-1B8F-800FABED938A}"/>
               </a:ext>
             </a:extLst>
           </p:cNvPr>
@@ -5529,7 +5523,7 @@
           <p:cNvPr id="4" name="テキスト ボックス 3">
             <a:extLst>
               <a:ext uri="{FF2B5EF4-FFF2-40B4-BE49-F238E27FC236}">
-                <a16:creationId xmlns:a16="http://schemas.microsoft.com/office/drawing/2014/main" id="{C5C2874F-4253-F91C-7BA0-4556C9AC0E67}"/>
+                <a16:creationId xmlns:a16="http://schemas.microsoft.com/office/drawing/2014/main" id="{33F34917-2DC5-4EFB-3E81-86ADBBEED55E}"/>
               </a:ext>
             </a:extLst>
           </p:cNvPr>
@@ -5594,7 +5588,7 @@
           <p:cNvPr id="5" name="テキスト ボックス 4">
             <a:extLst>
               <a:ext uri="{FF2B5EF4-FFF2-40B4-BE49-F238E27FC236}">
-                <a16:creationId xmlns:a16="http://schemas.microsoft.com/office/drawing/2014/main" id="{305AB93C-DA7D-791F-1821-82D6378B323A}"/>
+                <a16:creationId xmlns:a16="http://schemas.microsoft.com/office/drawing/2014/main" id="{91116FC9-1396-AF95-D0A9-CC69DB651683}"/>
               </a:ext>
             </a:extLst>
           </p:cNvPr>
@@ -5641,7 +5635,7 @@
             <a:hlinkClick r:id="" action="ppaction://media"/>
             <a:extLst>
               <a:ext uri="{FF2B5EF4-FFF2-40B4-BE49-F238E27FC236}">
-                <a16:creationId xmlns:a16="http://schemas.microsoft.com/office/drawing/2014/main" id="{6D2F3419-5CAA-B683-59DE-74400F249CC1}"/>
+                <a16:creationId xmlns:a16="http://schemas.microsoft.com/office/drawing/2014/main" id="{5B3A3FEF-FF0E-373E-F7F3-43DFEE0024A3}"/>
               </a:ext>
             </a:extLst>
           </p:cNvPr>
@@ -5676,7 +5670,7 @@
     </p:spTree>
     <p:extLst>
       <p:ext uri="{BB962C8B-B14F-4D97-AF65-F5344CB8AC3E}">
-        <p14:creationId xmlns:p14="http://schemas.microsoft.com/office/powerpoint/2010/main" val="2826678277"/>
+        <p14:creationId xmlns:p14="http://schemas.microsoft.com/office/powerpoint/2010/main" val="2919405556"/>
       </p:ext>
     </p:extLst>
   </p:cSld>
